--- a/skedee.pptx
+++ b/skedee.pptx
@@ -13,12 +13,15 @@
     <p:sldId id="269" r:id="rId7"/>
     <p:sldId id="261" r:id="rId8"/>
     <p:sldId id="266" r:id="rId9"/>
-    <p:sldId id="267" r:id="rId10"/>
-    <p:sldId id="268" r:id="rId11"/>
-    <p:sldId id="271" r:id="rId12"/>
-    <p:sldId id="273" r:id="rId13"/>
-    <p:sldId id="275" r:id="rId14"/>
-    <p:sldId id="276" r:id="rId15"/>
+    <p:sldId id="277" r:id="rId10"/>
+    <p:sldId id="278" r:id="rId11"/>
+    <p:sldId id="267" r:id="rId12"/>
+    <p:sldId id="268" r:id="rId13"/>
+    <p:sldId id="271" r:id="rId14"/>
+    <p:sldId id="279" r:id="rId15"/>
+    <p:sldId id="273" r:id="rId16"/>
+    <p:sldId id="275" r:id="rId17"/>
+    <p:sldId id="276" r:id="rId18"/>
   </p:sldIdLst>
   <p:sldSz cx="12192000" cy="6858000"/>
   <p:notesSz cx="6858000" cy="9144000"/>
@@ -130,7 +133,7 @@
   <pc:docChgLst>
     <pc:chgData name="Jaden Kadiri" userId="745fb9c10576bb83" providerId="LiveId" clId="{F572C1A7-9CBF-405D-95BE-BA9926A2A3F7}"/>
     <pc:docChg chg="undo custSel addSld delSld modSld">
-      <pc:chgData name="Jaden Kadiri" userId="745fb9c10576bb83" providerId="LiveId" clId="{F572C1A7-9CBF-405D-95BE-BA9926A2A3F7}" dt="2026-05-13T11:03:38.959" v="1231" actId="14100"/>
+      <pc:chgData name="Jaden Kadiri" userId="745fb9c10576bb83" providerId="LiveId" clId="{F572C1A7-9CBF-405D-95BE-BA9926A2A3F7}" dt="2026-05-16T15:22:39.073" v="1259" actId="680"/>
       <pc:docMkLst>
         <pc:docMk/>
       </pc:docMkLst>
@@ -148,34 +151,6 @@
             <ac:spMk id="4" creationId="{92A60EC3-E9E5-D19F-46B7-409BF22FB646}"/>
           </ac:spMkLst>
         </pc:spChg>
-      </pc:sldChg>
-      <pc:sldChg chg="del">
-        <pc:chgData name="Jaden Kadiri" userId="745fb9c10576bb83" providerId="LiveId" clId="{F572C1A7-9CBF-405D-95BE-BA9926A2A3F7}" dt="2026-05-12T08:38:50.611" v="111" actId="47"/>
-        <pc:sldMkLst>
-          <pc:docMk/>
-          <pc:sldMk cId="865095802" sldId="257"/>
-        </pc:sldMkLst>
-      </pc:sldChg>
-      <pc:sldChg chg="add del">
-        <pc:chgData name="Jaden Kadiri" userId="745fb9c10576bb83" providerId="LiveId" clId="{F572C1A7-9CBF-405D-95BE-BA9926A2A3F7}" dt="2026-05-12T08:41:14.138" v="134" actId="47"/>
-        <pc:sldMkLst>
-          <pc:docMk/>
-          <pc:sldMk cId="2793651055" sldId="258"/>
-        </pc:sldMkLst>
-      </pc:sldChg>
-      <pc:sldChg chg="del">
-        <pc:chgData name="Jaden Kadiri" userId="745fb9c10576bb83" providerId="LiveId" clId="{F572C1A7-9CBF-405D-95BE-BA9926A2A3F7}" dt="2026-05-12T08:41:14.138" v="134" actId="47"/>
-        <pc:sldMkLst>
-          <pc:docMk/>
-          <pc:sldMk cId="376130101" sldId="259"/>
-        </pc:sldMkLst>
-      </pc:sldChg>
-      <pc:sldChg chg="del">
-        <pc:chgData name="Jaden Kadiri" userId="745fb9c10576bb83" providerId="LiveId" clId="{F572C1A7-9CBF-405D-95BE-BA9926A2A3F7}" dt="2026-05-12T08:41:14.138" v="134" actId="47"/>
-        <pc:sldMkLst>
-          <pc:docMk/>
-          <pc:sldMk cId="337036811" sldId="260"/>
-        </pc:sldMkLst>
       </pc:sldChg>
       <pc:sldChg chg="modSp add mod">
         <pc:chgData name="Jaden Kadiri" userId="745fb9c10576bb83" providerId="LiveId" clId="{F572C1A7-9CBF-405D-95BE-BA9926A2A3F7}" dt="2026-05-12T08:38:31.308" v="108" actId="208"/>
@@ -200,51 +175,12 @@
           </ac:spMkLst>
         </pc:spChg>
       </pc:sldChg>
-      <pc:sldChg chg="modSp new del mod">
-        <pc:chgData name="Jaden Kadiri" userId="745fb9c10576bb83" providerId="LiveId" clId="{F572C1A7-9CBF-405D-95BE-BA9926A2A3F7}" dt="2026-05-12T08:41:14.138" v="134" actId="47"/>
-        <pc:sldMkLst>
-          <pc:docMk/>
-          <pc:sldMk cId="2356710061" sldId="262"/>
-        </pc:sldMkLst>
-        <pc:spChg chg="mod">
-          <ac:chgData name="Jaden Kadiri" userId="745fb9c10576bb83" providerId="LiveId" clId="{F572C1A7-9CBF-405D-95BE-BA9926A2A3F7}" dt="2026-05-12T07:05:03.131" v="99" actId="2711"/>
-          <ac:spMkLst>
-            <pc:docMk/>
-            <pc:sldMk cId="2356710061" sldId="262"/>
-            <ac:spMk id="2" creationId="{D3048377-6D79-8559-C29D-2150B803FED8}"/>
-          </ac:spMkLst>
-        </pc:spChg>
-        <pc:spChg chg="mod">
-          <ac:chgData name="Jaden Kadiri" userId="745fb9c10576bb83" providerId="LiveId" clId="{F572C1A7-9CBF-405D-95BE-BA9926A2A3F7}" dt="2026-05-12T07:04:06.162" v="98" actId="2711"/>
-          <ac:spMkLst>
-            <pc:docMk/>
-            <pc:sldMk cId="2356710061" sldId="262"/>
-            <ac:spMk id="3" creationId="{FDFE1DF7-15AE-6929-2435-189C25D09B5C}"/>
-          </ac:spMkLst>
-        </pc:spChg>
-      </pc:sldChg>
       <pc:sldChg chg="addSp delSp modSp new mod">
         <pc:chgData name="Jaden Kadiri" userId="745fb9c10576bb83" providerId="LiveId" clId="{F572C1A7-9CBF-405D-95BE-BA9926A2A3F7}" dt="2026-05-12T08:31:13.026" v="107" actId="1076"/>
         <pc:sldMkLst>
           <pc:docMk/>
           <pc:sldMk cId="912412743" sldId="263"/>
         </pc:sldMkLst>
-        <pc:spChg chg="del">
-          <ac:chgData name="Jaden Kadiri" userId="745fb9c10576bb83" providerId="LiveId" clId="{F572C1A7-9CBF-405D-95BE-BA9926A2A3F7}" dt="2026-05-12T08:30:46.021" v="101" actId="478"/>
-          <ac:spMkLst>
-            <pc:docMk/>
-            <pc:sldMk cId="912412743" sldId="263"/>
-            <ac:spMk id="2" creationId="{7F7D2F25-A4A3-9C9A-AE26-ADC665749146}"/>
-          </ac:spMkLst>
-        </pc:spChg>
-        <pc:spChg chg="del">
-          <ac:chgData name="Jaden Kadiri" userId="745fb9c10576bb83" providerId="LiveId" clId="{F572C1A7-9CBF-405D-95BE-BA9926A2A3F7}" dt="2026-05-12T08:30:46.021" v="101" actId="478"/>
-          <ac:spMkLst>
-            <pc:docMk/>
-            <pc:sldMk cId="912412743" sldId="263"/>
-            <ac:spMk id="3" creationId="{F1FE04F8-06CD-3AD2-D3E1-E32046B09F48}"/>
-          </ac:spMkLst>
-        </pc:spChg>
         <pc:picChg chg="add mod modCrop">
           <ac:chgData name="Jaden Kadiri" userId="745fb9c10576bb83" providerId="LiveId" clId="{F572C1A7-9CBF-405D-95BE-BA9926A2A3F7}" dt="2026-05-12T08:31:13.026" v="107" actId="1076"/>
           <ac:picMkLst>
@@ -254,71 +190,18 @@
           </ac:picMkLst>
         </pc:picChg>
       </pc:sldChg>
-      <pc:sldChg chg="delSp new del mod">
-        <pc:chgData name="Jaden Kadiri" userId="745fb9c10576bb83" providerId="LiveId" clId="{F572C1A7-9CBF-405D-95BE-BA9926A2A3F7}" dt="2026-05-12T08:41:23.836" v="136" actId="47"/>
-        <pc:sldMkLst>
-          <pc:docMk/>
-          <pc:sldMk cId="1206986804" sldId="264"/>
-        </pc:sldMkLst>
-        <pc:spChg chg="del">
-          <ac:chgData name="Jaden Kadiri" userId="745fb9c10576bb83" providerId="LiveId" clId="{F572C1A7-9CBF-405D-95BE-BA9926A2A3F7}" dt="2026-05-12T08:38:45.714" v="110" actId="478"/>
-          <ac:spMkLst>
-            <pc:docMk/>
-            <pc:sldMk cId="1206986804" sldId="264"/>
-            <ac:spMk id="2" creationId="{4B8ACC7B-6E33-6CB8-A47A-765D1E888851}"/>
-          </ac:spMkLst>
-        </pc:spChg>
-        <pc:spChg chg="del">
-          <ac:chgData name="Jaden Kadiri" userId="745fb9c10576bb83" providerId="LiveId" clId="{F572C1A7-9CBF-405D-95BE-BA9926A2A3F7}" dt="2026-05-12T08:38:45.714" v="110" actId="478"/>
-          <ac:spMkLst>
-            <pc:docMk/>
-            <pc:sldMk cId="1206986804" sldId="264"/>
-            <ac:spMk id="3" creationId="{E47C12B2-116E-CDE0-A6D0-17D072409472}"/>
-          </ac:spMkLst>
-        </pc:spChg>
-      </pc:sldChg>
       <pc:sldChg chg="addSp delSp modSp new mod">
         <pc:chgData name="Jaden Kadiri" userId="745fb9c10576bb83" providerId="LiveId" clId="{F572C1A7-9CBF-405D-95BE-BA9926A2A3F7}" dt="2026-05-12T08:40:30.002" v="132" actId="1076"/>
         <pc:sldMkLst>
           <pc:docMk/>
           <pc:sldMk cId="3494800973" sldId="265"/>
         </pc:sldMkLst>
-        <pc:spChg chg="add del mod">
-          <ac:chgData name="Jaden Kadiri" userId="745fb9c10576bb83" providerId="LiveId" clId="{F572C1A7-9CBF-405D-95BE-BA9926A2A3F7}" dt="2026-05-12T08:40:05.695" v="126" actId="478"/>
-          <ac:spMkLst>
-            <pc:docMk/>
-            <pc:sldMk cId="3494800973" sldId="265"/>
-            <ac:spMk id="2" creationId="{5C41C8D5-DB4E-0B03-09EB-C3ED40F47DE0}"/>
-          </ac:spMkLst>
-        </pc:spChg>
         <pc:picChg chg="add mod modCrop">
           <ac:chgData name="Jaden Kadiri" userId="745fb9c10576bb83" providerId="LiveId" clId="{F572C1A7-9CBF-405D-95BE-BA9926A2A3F7}" dt="2026-05-12T08:40:30.002" v="132" actId="1076"/>
           <ac:picMkLst>
             <pc:docMk/>
             <pc:sldMk cId="3494800973" sldId="265"/>
             <ac:picMk id="4" creationId="{88B6725D-4460-2DDE-ABCA-91128FE829C6}"/>
-          </ac:picMkLst>
-        </pc:picChg>
-      </pc:sldChg>
-      <pc:sldChg chg="new del">
-        <pc:chgData name="Jaden Kadiri" userId="745fb9c10576bb83" providerId="LiveId" clId="{F572C1A7-9CBF-405D-95BE-BA9926A2A3F7}" dt="2026-05-12T08:40:01.023" v="123" actId="47"/>
-        <pc:sldMkLst>
-          <pc:docMk/>
-          <pc:sldMk cId="3768007548" sldId="265"/>
-        </pc:sldMkLst>
-      </pc:sldChg>
-      <pc:sldChg chg="modSp add del mod">
-        <pc:chgData name="Jaden Kadiri" userId="745fb9c10576bb83" providerId="LiveId" clId="{F572C1A7-9CBF-405D-95BE-BA9926A2A3F7}" dt="2026-05-12T08:39:28.586" v="117"/>
-        <pc:sldMkLst>
-          <pc:docMk/>
-          <pc:sldMk cId="4253373658" sldId="265"/>
-        </pc:sldMkLst>
-        <pc:picChg chg="mod">
-          <ac:chgData name="Jaden Kadiri" userId="745fb9c10576bb83" providerId="LiveId" clId="{F572C1A7-9CBF-405D-95BE-BA9926A2A3F7}" dt="2026-05-12T08:39:21.103" v="116" actId="207"/>
-          <ac:picMkLst>
-            <pc:docMk/>
-            <pc:sldMk cId="4253373658" sldId="265"/>
-            <ac:picMk id="5" creationId="{70453358-9469-271F-39BF-CD5F93433BE8}"/>
           </ac:picMkLst>
         </pc:picChg>
       </pc:sldChg>
@@ -381,14 +264,6 @@
             <ac:picMk id="3" creationId="{95AF358A-9B21-730D-4E9C-3FCDE1FADF4A}"/>
           </ac:picMkLst>
         </pc:picChg>
-        <pc:picChg chg="add del">
-          <ac:chgData name="Jaden Kadiri" userId="745fb9c10576bb83" providerId="LiveId" clId="{F572C1A7-9CBF-405D-95BE-BA9926A2A3F7}" dt="2026-05-12T08:43:45.870" v="150" actId="478"/>
-          <ac:picMkLst>
-            <pc:docMk/>
-            <pc:sldMk cId="1686847949" sldId="269"/>
-            <ac:picMk id="5" creationId="{F022C0D4-FFD4-52B3-96B9-914EE273F38A}"/>
-          </ac:picMkLst>
-        </pc:picChg>
       </pc:sldChg>
       <pc:sldChg chg="addSp delSp modSp new mod">
         <pc:chgData name="Jaden Kadiri" userId="745fb9c10576bb83" providerId="LiveId" clId="{F572C1A7-9CBF-405D-95BE-BA9926A2A3F7}" dt="2026-05-12T09:15:22.689" v="219" actId="207"/>
@@ -396,38 +271,6 @@
           <pc:docMk/>
           <pc:sldMk cId="2181340433" sldId="270"/>
         </pc:sldMkLst>
-        <pc:spChg chg="del">
-          <ac:chgData name="Jaden Kadiri" userId="745fb9c10576bb83" providerId="LiveId" clId="{F572C1A7-9CBF-405D-95BE-BA9926A2A3F7}" dt="2026-05-12T09:12:36.818" v="154" actId="478"/>
-          <ac:spMkLst>
-            <pc:docMk/>
-            <pc:sldMk cId="2181340433" sldId="270"/>
-            <ac:spMk id="2" creationId="{7CFFA016-274E-1806-6EB1-5DE14B13A9FE}"/>
-          </ac:spMkLst>
-        </pc:spChg>
-        <pc:spChg chg="del">
-          <ac:chgData name="Jaden Kadiri" userId="745fb9c10576bb83" providerId="LiveId" clId="{F572C1A7-9CBF-405D-95BE-BA9926A2A3F7}" dt="2026-05-12T09:12:36.818" v="154" actId="478"/>
-          <ac:spMkLst>
-            <pc:docMk/>
-            <pc:sldMk cId="2181340433" sldId="270"/>
-            <ac:spMk id="3" creationId="{8EAA351F-3B3F-30A4-3E90-760A9554B24F}"/>
-          </ac:spMkLst>
-        </pc:spChg>
-        <pc:spChg chg="add del mod">
-          <ac:chgData name="Jaden Kadiri" userId="745fb9c10576bb83" providerId="LiveId" clId="{F572C1A7-9CBF-405D-95BE-BA9926A2A3F7}" dt="2026-05-12T09:13:06.148" v="161" actId="478"/>
-          <ac:spMkLst>
-            <pc:docMk/>
-            <pc:sldMk cId="2181340433" sldId="270"/>
-            <ac:spMk id="4" creationId="{881A17DA-3190-97DF-DA67-28B64B3EE555}"/>
-          </ac:spMkLst>
-        </pc:spChg>
-        <pc:spChg chg="add del mod">
-          <ac:chgData name="Jaden Kadiri" userId="745fb9c10576bb83" providerId="LiveId" clId="{F572C1A7-9CBF-405D-95BE-BA9926A2A3F7}" dt="2026-05-12T09:13:02.745" v="160" actId="478"/>
-          <ac:spMkLst>
-            <pc:docMk/>
-            <pc:sldMk cId="2181340433" sldId="270"/>
-            <ac:spMk id="5" creationId="{F8422C1D-A71D-40A5-9F18-0C922E0417D2}"/>
-          </ac:spMkLst>
-        </pc:spChg>
         <pc:spChg chg="add mod">
           <ac:chgData name="Jaden Kadiri" userId="745fb9c10576bb83" providerId="LiveId" clId="{F572C1A7-9CBF-405D-95BE-BA9926A2A3F7}" dt="2026-05-12T09:15:10.309" v="217" actId="207"/>
           <ac:spMkLst>
@@ -453,13 +296,6 @@
           </ac:spMkLst>
         </pc:spChg>
       </pc:sldChg>
-      <pc:sldChg chg="new del">
-        <pc:chgData name="Jaden Kadiri" userId="745fb9c10576bb83" providerId="LiveId" clId="{F572C1A7-9CBF-405D-95BE-BA9926A2A3F7}" dt="2026-05-12T09:12:31.564" v="152" actId="47"/>
-        <pc:sldMkLst>
-          <pc:docMk/>
-          <pc:sldMk cId="2332896630" sldId="270"/>
-        </pc:sldMkLst>
-      </pc:sldChg>
       <pc:sldChg chg="addSp delSp modSp new mod">
         <pc:chgData name="Jaden Kadiri" userId="745fb9c10576bb83" providerId="LiveId" clId="{F572C1A7-9CBF-405D-95BE-BA9926A2A3F7}" dt="2026-05-12T11:02:25.571" v="578" actId="1076"/>
         <pc:sldMkLst>
@@ -472,22 +308,6 @@
             <pc:docMk/>
             <pc:sldMk cId="3159782142" sldId="271"/>
             <ac:spMk id="2" creationId="{0651370F-2D80-D761-EB13-960BEA597428}"/>
-          </ac:spMkLst>
-        </pc:spChg>
-        <pc:spChg chg="del">
-          <ac:chgData name="Jaden Kadiri" userId="745fb9c10576bb83" providerId="LiveId" clId="{F572C1A7-9CBF-405D-95BE-BA9926A2A3F7}" dt="2026-05-12T09:52:37.649" v="221" actId="478"/>
-          <ac:spMkLst>
-            <pc:docMk/>
-            <pc:sldMk cId="3159782142" sldId="271"/>
-            <ac:spMk id="2" creationId="{8A86FF66-5779-CA41-3498-DEF35558BB8B}"/>
-          </ac:spMkLst>
-        </pc:spChg>
-        <pc:spChg chg="del">
-          <ac:chgData name="Jaden Kadiri" userId="745fb9c10576bb83" providerId="LiveId" clId="{F572C1A7-9CBF-405D-95BE-BA9926A2A3F7}" dt="2026-05-12T09:52:37.649" v="221" actId="478"/>
-          <ac:spMkLst>
-            <pc:docMk/>
-            <pc:sldMk cId="3159782142" sldId="271"/>
-            <ac:spMk id="3" creationId="{6A592D6B-EED7-870A-B703-306D4C71E5A6}"/>
           </ac:spMkLst>
         </pc:spChg>
         <pc:spChg chg="add mod">
@@ -530,22 +350,6 @@
             <ac:spMk id="8" creationId="{8D6890F9-1387-4144-3A40-3523C6F4B64C}"/>
           </ac:spMkLst>
         </pc:spChg>
-        <pc:spChg chg="add del mod">
-          <ac:chgData name="Jaden Kadiri" userId="745fb9c10576bb83" providerId="LiveId" clId="{F572C1A7-9CBF-405D-95BE-BA9926A2A3F7}" dt="2026-05-12T10:58:59.394" v="559" actId="478"/>
-          <ac:spMkLst>
-            <pc:docMk/>
-            <pc:sldMk cId="3159782142" sldId="271"/>
-            <ac:spMk id="9" creationId="{45739F7E-28C4-F675-59E0-442EEAA5C22B}"/>
-          </ac:spMkLst>
-        </pc:spChg>
-        <pc:picChg chg="add del">
-          <ac:chgData name="Jaden Kadiri" userId="745fb9c10576bb83" providerId="LiveId" clId="{F572C1A7-9CBF-405D-95BE-BA9926A2A3F7}" dt="2026-05-12T10:59:09.947" v="561" actId="478"/>
-          <ac:picMkLst>
-            <pc:docMk/>
-            <pc:sldMk cId="3159782142" sldId="271"/>
-            <ac:picMk id="1026" creationId="{A273F909-FA7C-2ED5-C23F-EF1FA109672E}"/>
-          </ac:picMkLst>
-        </pc:picChg>
         <pc:picChg chg="add mod">
           <ac:chgData name="Jaden Kadiri" userId="745fb9c10576bb83" providerId="LiveId" clId="{F572C1A7-9CBF-405D-95BE-BA9926A2A3F7}" dt="2026-05-12T11:02:21.326" v="577" actId="1076"/>
           <ac:picMkLst>
@@ -563,169 +367,12 @@
           </ac:picMkLst>
         </pc:picChg>
       </pc:sldChg>
-      <pc:sldChg chg="addSp delSp modSp new del mod setBg">
-        <pc:chgData name="Jaden Kadiri" userId="745fb9c10576bb83" providerId="LiveId" clId="{F572C1A7-9CBF-405D-95BE-BA9926A2A3F7}" dt="2026-05-12T17:56:38.425" v="681" actId="47"/>
-        <pc:sldMkLst>
-          <pc:docMk/>
-          <pc:sldMk cId="55229810" sldId="272"/>
-        </pc:sldMkLst>
-        <pc:spChg chg="del">
-          <ac:chgData name="Jaden Kadiri" userId="745fb9c10576bb83" providerId="LiveId" clId="{F572C1A7-9CBF-405D-95BE-BA9926A2A3F7}" dt="2026-05-12T17:36:20.532" v="580" actId="478"/>
-          <ac:spMkLst>
-            <pc:docMk/>
-            <pc:sldMk cId="55229810" sldId="272"/>
-            <ac:spMk id="2" creationId="{004315AB-DF8B-E0F0-146E-24E1748A2E86}"/>
-          </ac:spMkLst>
-        </pc:spChg>
-        <pc:spChg chg="del">
-          <ac:chgData name="Jaden Kadiri" userId="745fb9c10576bb83" providerId="LiveId" clId="{F572C1A7-9CBF-405D-95BE-BA9926A2A3F7}" dt="2026-05-12T17:36:20.532" v="580" actId="478"/>
-          <ac:spMkLst>
-            <pc:docMk/>
-            <pc:sldMk cId="55229810" sldId="272"/>
-            <ac:spMk id="3" creationId="{92621E9F-099B-F942-CEE0-8121C04E84AE}"/>
-          </ac:spMkLst>
-        </pc:spChg>
-        <pc:spChg chg="add mod">
-          <ac:chgData name="Jaden Kadiri" userId="745fb9c10576bb83" providerId="LiveId" clId="{F572C1A7-9CBF-405D-95BE-BA9926A2A3F7}" dt="2026-05-12T17:41:15.518" v="641" actId="2711"/>
-          <ac:spMkLst>
-            <pc:docMk/>
-            <pc:sldMk cId="55229810" sldId="272"/>
-            <ac:spMk id="7" creationId="{50AB7B02-FFD1-C88D-8CEB-CFDF3389A775}"/>
-          </ac:spMkLst>
-        </pc:spChg>
-        <pc:spChg chg="add mod">
-          <ac:chgData name="Jaden Kadiri" userId="745fb9c10576bb83" providerId="LiveId" clId="{F572C1A7-9CBF-405D-95BE-BA9926A2A3F7}" dt="2026-05-12T17:47:25.704" v="680" actId="1076"/>
-          <ac:spMkLst>
-            <pc:docMk/>
-            <pc:sldMk cId="55229810" sldId="272"/>
-            <ac:spMk id="8" creationId="{358A64D3-6A6B-24F0-D12D-00078C4AA50C}"/>
-          </ac:spMkLst>
-        </pc:spChg>
-        <pc:picChg chg="add mod modCrop">
-          <ac:chgData name="Jaden Kadiri" userId="745fb9c10576bb83" providerId="LiveId" clId="{F572C1A7-9CBF-405D-95BE-BA9926A2A3F7}" dt="2026-05-12T17:38:56.573" v="587" actId="1076"/>
-          <ac:picMkLst>
-            <pc:docMk/>
-            <pc:sldMk cId="55229810" sldId="272"/>
-            <ac:picMk id="5" creationId="{8FBF879B-4AEF-45A7-A38A-456ED720CE0E}"/>
-          </ac:picMkLst>
-        </pc:picChg>
-        <pc:picChg chg="add mod modCrop">
-          <ac:chgData name="Jaden Kadiri" userId="745fb9c10576bb83" providerId="LiveId" clId="{F572C1A7-9CBF-405D-95BE-BA9926A2A3F7}" dt="2026-05-12T17:39:08.682" v="589" actId="1076"/>
-          <ac:picMkLst>
-            <pc:docMk/>
-            <pc:sldMk cId="55229810" sldId="272"/>
-            <ac:picMk id="6" creationId="{E56AB3FE-A03C-0E70-4667-27B43C031426}"/>
-          </ac:picMkLst>
-        </pc:picChg>
-      </pc:sldChg>
-      <pc:sldChg chg="new del">
-        <pc:chgData name="Jaden Kadiri" userId="745fb9c10576bb83" providerId="LiveId" clId="{F572C1A7-9CBF-405D-95BE-BA9926A2A3F7}" dt="2026-05-12T10:07:26.051" v="444" actId="47"/>
-        <pc:sldMkLst>
-          <pc:docMk/>
-          <pc:sldMk cId="1324250896" sldId="272"/>
-        </pc:sldMkLst>
-      </pc:sldChg>
-      <pc:sldChg chg="addSp delSp modSp new del mod">
-        <pc:chgData name="Jaden Kadiri" userId="745fb9c10576bb83" providerId="LiveId" clId="{F572C1A7-9CBF-405D-95BE-BA9926A2A3F7}" dt="2026-05-13T10:43:58.471" v="945" actId="47"/>
-        <pc:sldMkLst>
-          <pc:docMk/>
-          <pc:sldMk cId="1435824609" sldId="272"/>
-        </pc:sldMkLst>
-        <pc:spChg chg="del">
-          <ac:chgData name="Jaden Kadiri" userId="745fb9c10576bb83" providerId="LiveId" clId="{F572C1A7-9CBF-405D-95BE-BA9926A2A3F7}" dt="2026-05-12T20:50:21.322" v="683" actId="478"/>
-          <ac:spMkLst>
-            <pc:docMk/>
-            <pc:sldMk cId="1435824609" sldId="272"/>
-            <ac:spMk id="2" creationId="{376F7E36-4F4A-4056-2176-723C62977DEC}"/>
-          </ac:spMkLst>
-        </pc:spChg>
-        <pc:spChg chg="del">
-          <ac:chgData name="Jaden Kadiri" userId="745fb9c10576bb83" providerId="LiveId" clId="{F572C1A7-9CBF-405D-95BE-BA9926A2A3F7}" dt="2026-05-12T20:50:21.322" v="683" actId="478"/>
-          <ac:spMkLst>
-            <pc:docMk/>
-            <pc:sldMk cId="1435824609" sldId="272"/>
-            <ac:spMk id="3" creationId="{4CE3C8D0-E9FF-DA7C-8499-EA1CDB399823}"/>
-          </ac:spMkLst>
-        </pc:spChg>
-        <pc:spChg chg="add mod">
-          <ac:chgData name="Jaden Kadiri" userId="745fb9c10576bb83" providerId="LiveId" clId="{F572C1A7-9CBF-405D-95BE-BA9926A2A3F7}" dt="2026-05-12T21:18:23.388" v="710" actId="1076"/>
-          <ac:spMkLst>
-            <pc:docMk/>
-            <pc:sldMk cId="1435824609" sldId="272"/>
-            <ac:spMk id="4" creationId="{51DD1C6D-2B31-691A-CDA8-D1C933647F2F}"/>
-          </ac:spMkLst>
-        </pc:spChg>
-        <pc:spChg chg="add del mod">
-          <ac:chgData name="Jaden Kadiri" userId="745fb9c10576bb83" providerId="LiveId" clId="{F572C1A7-9CBF-405D-95BE-BA9926A2A3F7}" dt="2026-05-12T21:16:44.917" v="691" actId="478"/>
-          <ac:spMkLst>
-            <pc:docMk/>
-            <pc:sldMk cId="1435824609" sldId="272"/>
-            <ac:spMk id="5" creationId="{921D7382-48CA-2E4F-724D-425D5A492C25}"/>
-          </ac:spMkLst>
-        </pc:spChg>
-        <pc:spChg chg="add mod">
-          <ac:chgData name="Jaden Kadiri" userId="745fb9c10576bb83" providerId="LiveId" clId="{F572C1A7-9CBF-405D-95BE-BA9926A2A3F7}" dt="2026-05-12T21:18:23.388" v="710" actId="1076"/>
-          <ac:spMkLst>
-            <pc:docMk/>
-            <pc:sldMk cId="1435824609" sldId="272"/>
-            <ac:spMk id="6" creationId="{A74A4A1B-7AC0-7D1D-2EDE-18C467CC5360}"/>
-          </ac:spMkLst>
-        </pc:spChg>
-        <pc:spChg chg="add mod">
-          <ac:chgData name="Jaden Kadiri" userId="745fb9c10576bb83" providerId="LiveId" clId="{F572C1A7-9CBF-405D-95BE-BA9926A2A3F7}" dt="2026-05-12T21:20:26.936" v="775" actId="20577"/>
-          <ac:spMkLst>
-            <pc:docMk/>
-            <pc:sldMk cId="1435824609" sldId="272"/>
-            <ac:spMk id="7" creationId="{458713E2-5A5A-3022-6650-BDB147C27513}"/>
-          </ac:spMkLst>
-        </pc:spChg>
-        <pc:spChg chg="add del mod">
-          <ac:chgData name="Jaden Kadiri" userId="745fb9c10576bb83" providerId="LiveId" clId="{F572C1A7-9CBF-405D-95BE-BA9926A2A3F7}" dt="2026-05-12T21:20:58.120" v="789" actId="478"/>
-          <ac:spMkLst>
-            <pc:docMk/>
-            <pc:sldMk cId="1435824609" sldId="272"/>
-            <ac:spMk id="8" creationId="{2D66B526-28D1-AE83-2A66-666F799CAE6B}"/>
-          </ac:spMkLst>
-        </pc:spChg>
-        <pc:spChg chg="add mod">
-          <ac:chgData name="Jaden Kadiri" userId="745fb9c10576bb83" providerId="LiveId" clId="{F572C1A7-9CBF-405D-95BE-BA9926A2A3F7}" dt="2026-05-12T21:22:31.136" v="940" actId="113"/>
-          <ac:spMkLst>
-            <pc:docMk/>
-            <pc:sldMk cId="1435824609" sldId="272"/>
-            <ac:spMk id="9" creationId="{DF78CC1E-4D9C-7130-DFF6-11CB54DD5584}"/>
-          </ac:spMkLst>
-        </pc:spChg>
-        <pc:spChg chg="add mod">
-          <ac:chgData name="Jaden Kadiri" userId="745fb9c10576bb83" providerId="LiveId" clId="{F572C1A7-9CBF-405D-95BE-BA9926A2A3F7}" dt="2026-05-12T21:22:39.685" v="941" actId="2711"/>
-          <ac:spMkLst>
-            <pc:docMk/>
-            <pc:sldMk cId="1435824609" sldId="272"/>
-            <ac:spMk id="10" creationId="{9EE55871-7639-D75C-4A7E-F60B1929FEAD}"/>
-          </ac:spMkLst>
-        </pc:spChg>
-      </pc:sldChg>
       <pc:sldChg chg="addSp delSp modSp new mod">
         <pc:chgData name="Jaden Kadiri" userId="745fb9c10576bb83" providerId="LiveId" clId="{F572C1A7-9CBF-405D-95BE-BA9926A2A3F7}" dt="2026-05-13T10:48:13.985" v="1062" actId="1076"/>
         <pc:sldMkLst>
           <pc:docMk/>
           <pc:sldMk cId="828719236" sldId="273"/>
         </pc:sldMkLst>
-        <pc:spChg chg="del">
-          <ac:chgData name="Jaden Kadiri" userId="745fb9c10576bb83" providerId="LiveId" clId="{F572C1A7-9CBF-405D-95BE-BA9926A2A3F7}" dt="2026-05-13T10:37:07.820" v="942" actId="478"/>
-          <ac:spMkLst>
-            <pc:docMk/>
-            <pc:sldMk cId="828719236" sldId="273"/>
-            <ac:spMk id="2" creationId="{5A57126F-85B7-FE38-191C-51D4B487C209}"/>
-          </ac:spMkLst>
-        </pc:spChg>
-        <pc:spChg chg="del">
-          <ac:chgData name="Jaden Kadiri" userId="745fb9c10576bb83" providerId="LiveId" clId="{F572C1A7-9CBF-405D-95BE-BA9926A2A3F7}" dt="2026-05-13T10:37:07.820" v="942" actId="478"/>
-          <ac:spMkLst>
-            <pc:docMk/>
-            <pc:sldMk cId="828719236" sldId="273"/>
-            <ac:spMk id="3" creationId="{2AE3EF8D-EDCE-A4D0-64EB-006F0E26CD41}"/>
-          </ac:spMkLst>
-        </pc:spChg>
         <pc:spChg chg="add mod">
           <ac:chgData name="Jaden Kadiri" userId="745fb9c10576bb83" providerId="LiveId" clId="{F572C1A7-9CBF-405D-95BE-BA9926A2A3F7}" dt="2026-05-13T10:47:56.191" v="1059" actId="14100"/>
           <ac:spMkLst>
@@ -828,46 +475,6 @@
           <pc:docMk/>
           <pc:sldMk cId="4048294982" sldId="275"/>
         </pc:sldMkLst>
-        <pc:spChg chg="del">
-          <ac:chgData name="Jaden Kadiri" userId="745fb9c10576bb83" providerId="LiveId" clId="{F572C1A7-9CBF-405D-95BE-BA9926A2A3F7}" dt="2026-05-13T10:48:35.801" v="1064" actId="478"/>
-          <ac:spMkLst>
-            <pc:docMk/>
-            <pc:sldMk cId="4048294982" sldId="275"/>
-            <ac:spMk id="2" creationId="{56D5D757-9F2A-9AF9-2FBF-FC0776F89CA8}"/>
-          </ac:spMkLst>
-        </pc:spChg>
-        <pc:spChg chg="del">
-          <ac:chgData name="Jaden Kadiri" userId="745fb9c10576bb83" providerId="LiveId" clId="{F572C1A7-9CBF-405D-95BE-BA9926A2A3F7}" dt="2026-05-13T10:48:35.801" v="1064" actId="478"/>
-          <ac:spMkLst>
-            <pc:docMk/>
-            <pc:sldMk cId="4048294982" sldId="275"/>
-            <ac:spMk id="3" creationId="{CF5DA21A-7EE0-813D-EC66-94668F7DA7EC}"/>
-          </ac:spMkLst>
-        </pc:spChg>
-        <pc:spChg chg="add del mod">
-          <ac:chgData name="Jaden Kadiri" userId="745fb9c10576bb83" providerId="LiveId" clId="{F572C1A7-9CBF-405D-95BE-BA9926A2A3F7}" dt="2026-05-13T10:51:44.214" v="1073" actId="21"/>
-          <ac:spMkLst>
-            <pc:docMk/>
-            <pc:sldMk cId="4048294982" sldId="275"/>
-            <ac:spMk id="4" creationId="{C24A91CA-3EDC-FC66-EB55-1E28E5CF8127}"/>
-          </ac:spMkLst>
-        </pc:spChg>
-        <pc:spChg chg="add del mod">
-          <ac:chgData name="Jaden Kadiri" userId="745fb9c10576bb83" providerId="LiveId" clId="{F572C1A7-9CBF-405D-95BE-BA9926A2A3F7}" dt="2026-05-13T10:48:46.215" v="1066" actId="21"/>
-          <ac:spMkLst>
-            <pc:docMk/>
-            <pc:sldMk cId="4048294982" sldId="275"/>
-            <ac:spMk id="5" creationId="{721B9B02-C547-8B8D-9B87-FEBC233E0478}"/>
-          </ac:spMkLst>
-        </pc:spChg>
-        <pc:spChg chg="add del mod">
-          <ac:chgData name="Jaden Kadiri" userId="745fb9c10576bb83" providerId="LiveId" clId="{F572C1A7-9CBF-405D-95BE-BA9926A2A3F7}" dt="2026-05-13T10:58:47.332" v="1087" actId="21"/>
-          <ac:spMkLst>
-            <pc:docMk/>
-            <pc:sldMk cId="4048294982" sldId="275"/>
-            <ac:spMk id="6" creationId="{99EDB431-0CA3-F42D-5D27-10E060CD8013}"/>
-          </ac:spMkLst>
-        </pc:spChg>
         <pc:spChg chg="add mod">
           <ac:chgData name="Jaden Kadiri" userId="745fb9c10576bb83" providerId="LiveId" clId="{F572C1A7-9CBF-405D-95BE-BA9926A2A3F7}" dt="2026-05-13T10:48:37.164" v="1065"/>
           <ac:spMkLst>
@@ -892,28 +499,12 @@
             <ac:spMk id="9" creationId="{0FD4A08A-D67D-3D77-C961-7B017B1124BB}"/>
           </ac:spMkLst>
         </pc:spChg>
-        <pc:spChg chg="add del mod">
-          <ac:chgData name="Jaden Kadiri" userId="745fb9c10576bb83" providerId="LiveId" clId="{F572C1A7-9CBF-405D-95BE-BA9926A2A3F7}" dt="2026-05-13T10:58:50.753" v="1090" actId="478"/>
-          <ac:spMkLst>
-            <pc:docMk/>
-            <pc:sldMk cId="4048294982" sldId="275"/>
-            <ac:spMk id="14" creationId="{99EDB431-0CA3-F42D-5D27-10E060CD8013}"/>
-          </ac:spMkLst>
-        </pc:spChg>
         <pc:picChg chg="add mod modCrop">
           <ac:chgData name="Jaden Kadiri" userId="745fb9c10576bb83" providerId="LiveId" clId="{F572C1A7-9CBF-405D-95BE-BA9926A2A3F7}" dt="2026-05-13T10:49:05.423" v="1072" actId="732"/>
           <ac:picMkLst>
             <pc:docMk/>
             <pc:sldMk cId="4048294982" sldId="275"/>
             <ac:picMk id="11" creationId="{5B4E3DBA-1EAA-2A38-C1B7-49394BD58E65}"/>
-          </ac:picMkLst>
-        </pc:picChg>
-        <pc:picChg chg="add del mod modCrop">
-          <ac:chgData name="Jaden Kadiri" userId="745fb9c10576bb83" providerId="LiveId" clId="{F572C1A7-9CBF-405D-95BE-BA9926A2A3F7}" dt="2026-05-13T10:58:48.891" v="1088" actId="478"/>
-          <ac:picMkLst>
-            <pc:docMk/>
-            <pc:sldMk cId="4048294982" sldId="275"/>
-            <ac:picMk id="13" creationId="{5150EB71-85D5-AB1B-FD00-C323FFF9016F}"/>
           </ac:picMkLst>
         </pc:picChg>
         <pc:picChg chg="add mod modCrop">
@@ -931,22 +522,6 @@
           <pc:docMk/>
           <pc:sldMk cId="3966544100" sldId="276"/>
         </pc:sldMkLst>
-        <pc:spChg chg="del">
-          <ac:chgData name="Jaden Kadiri" userId="745fb9c10576bb83" providerId="LiveId" clId="{F572C1A7-9CBF-405D-95BE-BA9926A2A3F7}" dt="2026-05-13T11:00:29.457" v="1110" actId="478"/>
-          <ac:spMkLst>
-            <pc:docMk/>
-            <pc:sldMk cId="3966544100" sldId="276"/>
-            <ac:spMk id="2" creationId="{313BFE6B-3427-556B-2FF3-EC2D5B8C0500}"/>
-          </ac:spMkLst>
-        </pc:spChg>
-        <pc:spChg chg="del">
-          <ac:chgData name="Jaden Kadiri" userId="745fb9c10576bb83" providerId="LiveId" clId="{F572C1A7-9CBF-405D-95BE-BA9926A2A3F7}" dt="2026-05-13T11:00:29.457" v="1110" actId="478"/>
-          <ac:spMkLst>
-            <pc:docMk/>
-            <pc:sldMk cId="3966544100" sldId="276"/>
-            <ac:spMk id="3" creationId="{73F3DCBC-96CE-2B3C-C584-C7D1786828BC}"/>
-          </ac:spMkLst>
-        </pc:spChg>
         <pc:spChg chg="add mod">
           <ac:chgData name="Jaden Kadiri" userId="745fb9c10576bb83" providerId="LiveId" clId="{F572C1A7-9CBF-405D-95BE-BA9926A2A3F7}" dt="2026-05-13T11:00:55.546" v="1127" actId="14100"/>
           <ac:spMkLst>
@@ -971,6 +546,98 @@
             <ac:spMk id="6" creationId="{0347098F-C99B-DE78-78D1-4352540EB67C}"/>
           </ac:spMkLst>
         </pc:spChg>
+      </pc:sldChg>
+      <pc:sldChg chg="addSp delSp modSp new mod">
+        <pc:chgData name="Jaden Kadiri" userId="745fb9c10576bb83" providerId="LiveId" clId="{F572C1A7-9CBF-405D-95BE-BA9926A2A3F7}" dt="2026-05-16T14:04:47.160" v="1258" actId="1076"/>
+        <pc:sldMkLst>
+          <pc:docMk/>
+          <pc:sldMk cId="492773096" sldId="277"/>
+        </pc:sldMkLst>
+        <pc:spChg chg="del">
+          <ac:chgData name="Jaden Kadiri" userId="745fb9c10576bb83" providerId="LiveId" clId="{F572C1A7-9CBF-405D-95BE-BA9926A2A3F7}" dt="2026-05-16T13:56:05.226" v="1233" actId="478"/>
+          <ac:spMkLst>
+            <pc:docMk/>
+            <pc:sldMk cId="492773096" sldId="277"/>
+            <ac:spMk id="2" creationId="{0C31EC66-24AE-5955-C740-8E4E41CBC6B2}"/>
+          </ac:spMkLst>
+        </pc:spChg>
+        <pc:spChg chg="del">
+          <ac:chgData name="Jaden Kadiri" userId="745fb9c10576bb83" providerId="LiveId" clId="{F572C1A7-9CBF-405D-95BE-BA9926A2A3F7}" dt="2026-05-16T13:56:05.226" v="1233" actId="478"/>
+          <ac:spMkLst>
+            <pc:docMk/>
+            <pc:sldMk cId="492773096" sldId="277"/>
+            <ac:spMk id="3" creationId="{E38D7775-2275-B992-C194-4B04AD332A7B}"/>
+          </ac:spMkLst>
+        </pc:spChg>
+        <pc:spChg chg="add del mod">
+          <ac:chgData name="Jaden Kadiri" userId="745fb9c10576bb83" providerId="LiveId" clId="{F572C1A7-9CBF-405D-95BE-BA9926A2A3F7}" dt="2026-05-16T13:57:21.028" v="1240" actId="21"/>
+          <ac:spMkLst>
+            <pc:docMk/>
+            <pc:sldMk cId="492773096" sldId="277"/>
+            <ac:spMk id="4" creationId="{9BCD3150-DC55-338A-3A7C-754035C41224}"/>
+          </ac:spMkLst>
+        </pc:spChg>
+        <pc:picChg chg="add del mod modCrop">
+          <ac:chgData name="Jaden Kadiri" userId="745fb9c10576bb83" providerId="LiveId" clId="{F572C1A7-9CBF-405D-95BE-BA9926A2A3F7}" dt="2026-05-16T14:04:24.631" v="1256" actId="478"/>
+          <ac:picMkLst>
+            <pc:docMk/>
+            <pc:sldMk cId="492773096" sldId="277"/>
+            <ac:picMk id="6" creationId="{1F2AB5BA-265E-56E6-98ED-65BECB499968}"/>
+          </ac:picMkLst>
+        </pc:picChg>
+        <pc:picChg chg="add mod">
+          <ac:chgData name="Jaden Kadiri" userId="745fb9c10576bb83" providerId="LiveId" clId="{F572C1A7-9CBF-405D-95BE-BA9926A2A3F7}" dt="2026-05-16T14:04:47.160" v="1258" actId="1076"/>
+          <ac:picMkLst>
+            <pc:docMk/>
+            <pc:sldMk cId="492773096" sldId="277"/>
+            <ac:picMk id="8" creationId="{8776C58A-8913-808C-7243-1F2D71A97FE5}"/>
+          </ac:picMkLst>
+        </pc:picChg>
+      </pc:sldChg>
+      <pc:sldChg chg="addSp delSp modSp add mod">
+        <pc:chgData name="Jaden Kadiri" userId="745fb9c10576bb83" providerId="LiveId" clId="{F572C1A7-9CBF-405D-95BE-BA9926A2A3F7}" dt="2026-05-16T14:01:22.720" v="1255" actId="22"/>
+        <pc:sldMkLst>
+          <pc:docMk/>
+          <pc:sldMk cId="1909643291" sldId="278"/>
+        </pc:sldMkLst>
+        <pc:spChg chg="add del mod">
+          <ac:chgData name="Jaden Kadiri" userId="745fb9c10576bb83" providerId="LiveId" clId="{F572C1A7-9CBF-405D-95BE-BA9926A2A3F7}" dt="2026-05-16T14:01:19.407" v="1254" actId="21"/>
+          <ac:spMkLst>
+            <pc:docMk/>
+            <pc:sldMk cId="1909643291" sldId="278"/>
+            <ac:spMk id="2" creationId="{5E55A62A-2FF2-0E22-1F32-7E1EB7F016A4}"/>
+          </ac:spMkLst>
+        </pc:spChg>
+        <pc:picChg chg="add">
+          <ac:chgData name="Jaden Kadiri" userId="745fb9c10576bb83" providerId="LiveId" clId="{F572C1A7-9CBF-405D-95BE-BA9926A2A3F7}" dt="2026-05-16T14:01:22.720" v="1255" actId="22"/>
+          <ac:picMkLst>
+            <pc:docMk/>
+            <pc:sldMk cId="1909643291" sldId="278"/>
+            <ac:picMk id="4" creationId="{E66962E9-BE6F-B084-9C62-8BFA32DE3121}"/>
+          </ac:picMkLst>
+        </pc:picChg>
+        <pc:picChg chg="del">
+          <ac:chgData name="Jaden Kadiri" userId="745fb9c10576bb83" providerId="LiveId" clId="{F572C1A7-9CBF-405D-95BE-BA9926A2A3F7}" dt="2026-05-16T14:01:00.769" v="1250" actId="478"/>
+          <ac:picMkLst>
+            <pc:docMk/>
+            <pc:sldMk cId="1909643291" sldId="278"/>
+            <ac:picMk id="6" creationId="{4CDBDA1A-ED3C-26C3-E9B0-9E285105B6C8}"/>
+          </ac:picMkLst>
+        </pc:picChg>
+      </pc:sldChg>
+      <pc:sldChg chg="new">
+        <pc:chgData name="Jaden Kadiri" userId="745fb9c10576bb83" providerId="LiveId" clId="{F572C1A7-9CBF-405D-95BE-BA9926A2A3F7}" dt="2026-05-16T15:22:39.073" v="1259" actId="680"/>
+        <pc:sldMkLst>
+          <pc:docMk/>
+          <pc:sldMk cId="3009126990" sldId="279"/>
+        </pc:sldMkLst>
+      </pc:sldChg>
+      <pc:sldChg chg="add del">
+        <pc:chgData name="Jaden Kadiri" userId="745fb9c10576bb83" providerId="LiveId" clId="{F572C1A7-9CBF-405D-95BE-BA9926A2A3F7}" dt="2026-05-16T14:01:05.686" v="1252" actId="47"/>
+        <pc:sldMkLst>
+          <pc:docMk/>
+          <pc:sldMk cId="3446310075" sldId="279"/>
+        </pc:sldMkLst>
       </pc:sldChg>
     </pc:docChg>
   </pc:docChgLst>
@@ -1124,7 +791,7 @@
           <a:p>
             <a:fld id="{3222DC7E-3A71-4921-83DC-30C1ECD910DE}" type="datetimeFigureOut">
               <a:rPr lang="en-US" smtClean="0"/>
-              <a:t>5/13/2026</a:t>
+              <a:t>5/16/2026</a:t>
             </a:fld>
             <a:endParaRPr lang="en-US"/>
           </a:p>
@@ -1322,7 +989,7 @@
           <a:p>
             <a:fld id="{3222DC7E-3A71-4921-83DC-30C1ECD910DE}" type="datetimeFigureOut">
               <a:rPr lang="en-US" smtClean="0"/>
-              <a:t>5/13/2026</a:t>
+              <a:t>5/16/2026</a:t>
             </a:fld>
             <a:endParaRPr lang="en-US"/>
           </a:p>
@@ -1530,7 +1197,7 @@
           <a:p>
             <a:fld id="{3222DC7E-3A71-4921-83DC-30C1ECD910DE}" type="datetimeFigureOut">
               <a:rPr lang="en-US" smtClean="0"/>
-              <a:t>5/13/2026</a:t>
+              <a:t>5/16/2026</a:t>
             </a:fld>
             <a:endParaRPr lang="en-US"/>
           </a:p>
@@ -1728,7 +1395,7 @@
           <a:p>
             <a:fld id="{3222DC7E-3A71-4921-83DC-30C1ECD910DE}" type="datetimeFigureOut">
               <a:rPr lang="en-US" smtClean="0"/>
-              <a:t>5/13/2026</a:t>
+              <a:t>5/16/2026</a:t>
             </a:fld>
             <a:endParaRPr lang="en-US"/>
           </a:p>
@@ -2003,7 +1670,7 @@
           <a:p>
             <a:fld id="{3222DC7E-3A71-4921-83DC-30C1ECD910DE}" type="datetimeFigureOut">
               <a:rPr lang="en-US" smtClean="0"/>
-              <a:t>5/13/2026</a:t>
+              <a:t>5/16/2026</a:t>
             </a:fld>
             <a:endParaRPr lang="en-US"/>
           </a:p>
@@ -2268,7 +1935,7 @@
           <a:p>
             <a:fld id="{3222DC7E-3A71-4921-83DC-30C1ECD910DE}" type="datetimeFigureOut">
               <a:rPr lang="en-US" smtClean="0"/>
-              <a:t>5/13/2026</a:t>
+              <a:t>5/16/2026</a:t>
             </a:fld>
             <a:endParaRPr lang="en-US"/>
           </a:p>
@@ -2680,7 +2347,7 @@
           <a:p>
             <a:fld id="{3222DC7E-3A71-4921-83DC-30C1ECD910DE}" type="datetimeFigureOut">
               <a:rPr lang="en-US" smtClean="0"/>
-              <a:t>5/13/2026</a:t>
+              <a:t>5/16/2026</a:t>
             </a:fld>
             <a:endParaRPr lang="en-US"/>
           </a:p>
@@ -2821,7 +2488,7 @@
           <a:p>
             <a:fld id="{3222DC7E-3A71-4921-83DC-30C1ECD910DE}" type="datetimeFigureOut">
               <a:rPr lang="en-US" smtClean="0"/>
-              <a:t>5/13/2026</a:t>
+              <a:t>5/16/2026</a:t>
             </a:fld>
             <a:endParaRPr lang="en-US"/>
           </a:p>
@@ -2934,7 +2601,7 @@
           <a:p>
             <a:fld id="{3222DC7E-3A71-4921-83DC-30C1ECD910DE}" type="datetimeFigureOut">
               <a:rPr lang="en-US" smtClean="0"/>
-              <a:t>5/13/2026</a:t>
+              <a:t>5/16/2026</a:t>
             </a:fld>
             <a:endParaRPr lang="en-US"/>
           </a:p>
@@ -3245,7 +2912,7 @@
           <a:p>
             <a:fld id="{3222DC7E-3A71-4921-83DC-30C1ECD910DE}" type="datetimeFigureOut">
               <a:rPr lang="en-US" smtClean="0"/>
-              <a:t>5/13/2026</a:t>
+              <a:t>5/16/2026</a:t>
             </a:fld>
             <a:endParaRPr lang="en-US"/>
           </a:p>
@@ -3533,7 +3200,7 @@
           <a:p>
             <a:fld id="{3222DC7E-3A71-4921-83DC-30C1ECD910DE}" type="datetimeFigureOut">
               <a:rPr lang="en-US" smtClean="0"/>
-              <a:t>5/13/2026</a:t>
+              <a:t>5/16/2026</a:t>
             </a:fld>
             <a:endParaRPr lang="en-US"/>
           </a:p>
@@ -3774,7 +3441,7 @@
           <a:p>
             <a:fld id="{3222DC7E-3A71-4921-83DC-30C1ECD910DE}" type="datetimeFigureOut">
               <a:rPr lang="en-US" smtClean="0"/>
-              <a:t>5/13/2026</a:t>
+              <a:t>5/16/2026</a:t>
             </a:fld>
             <a:endParaRPr lang="en-US"/>
           </a:p>
@@ -4372,7 +4039,7 @@
         <p:cNvPr id="1" name="">
           <a:extLst>
             <a:ext uri="{FF2B5EF4-FFF2-40B4-BE49-F238E27FC236}">
-              <a16:creationId xmlns:a16="http://schemas.microsoft.com/office/drawing/2014/main" id="{06B4BCC2-8F45-409D-4CBC-A61A5BD7E503}"/>
+              <a16:creationId xmlns:a16="http://schemas.microsoft.com/office/drawing/2014/main" id="{F246CCA7-D72A-4673-5916-1796C2007753}"/>
             </a:ext>
           </a:extLst>
         </p:cNvPr>
@@ -4387,12 +4054,78 @@
           <a:chExt cx="0" cy="0"/>
         </a:xfrm>
       </p:grpSpPr>
+      <p:pic>
+        <p:nvPicPr>
+          <p:cNvPr id="4" name="Picture 3">
+            <a:extLst>
+              <a:ext uri="{FF2B5EF4-FFF2-40B4-BE49-F238E27FC236}">
+                <a16:creationId xmlns:a16="http://schemas.microsoft.com/office/drawing/2014/main" id="{E66962E9-BE6F-B084-9C62-8BFA32DE3121}"/>
+              </a:ext>
+            </a:extLst>
+          </p:cNvPr>
+          <p:cNvPicPr>
+            <a:picLocks noChangeAspect="1"/>
+          </p:cNvPicPr>
+          <p:nvPr/>
+        </p:nvPicPr>
+        <p:blipFill>
+          <a:blip r:embed="rId2"/>
+          <a:stretch>
+            <a:fillRect/>
+          </a:stretch>
+        </p:blipFill>
+        <p:spPr>
+          <a:xfrm>
+            <a:off x="2636220" y="2322480"/>
+            <a:ext cx="6919560" cy="2213040"/>
+          </a:xfrm>
+          <a:prstGeom prst="rect">
+            <a:avLst/>
+          </a:prstGeom>
+        </p:spPr>
+      </p:pic>
+    </p:spTree>
+    <p:extLst>
+      <p:ext uri="{BB962C8B-B14F-4D97-AF65-F5344CB8AC3E}">
+        <p14:creationId xmlns:p14="http://schemas.microsoft.com/office/powerpoint/2010/main" val="1909643291"/>
+      </p:ext>
+    </p:extLst>
+  </p:cSld>
+  <p:clrMapOvr>
+    <a:masterClrMapping/>
+  </p:clrMapOvr>
+</p:sld>
+</file>
+
+<file path=ppt/slides/slide11.xml><?xml version="1.0" encoding="utf-8"?>
+<p:sld xmlns:a="http://schemas.openxmlformats.org/drawingml/2006/main" xmlns:r="http://schemas.openxmlformats.org/officeDocument/2006/relationships" xmlns:p="http://schemas.openxmlformats.org/presentationml/2006/main">
+  <p:cSld>
+    <p:spTree>
+      <p:nvGrpSpPr>
+        <p:cNvPr id="1" name="">
+          <a:extLst>
+            <a:ext uri="{FF2B5EF4-FFF2-40B4-BE49-F238E27FC236}">
+              <a16:creationId xmlns:a16="http://schemas.microsoft.com/office/drawing/2014/main" id="{A2A8C12B-02B4-6379-FBBE-525E70A497C7}"/>
+            </a:ext>
+          </a:extLst>
+        </p:cNvPr>
+        <p:cNvGrpSpPr/>
+        <p:nvPr/>
+      </p:nvGrpSpPr>
+      <p:grpSpPr>
+        <a:xfrm>
+          <a:off x="0" y="0"/>
+          <a:ext cx="0" cy="0"/>
+          <a:chOff x="0" y="0"/>
+          <a:chExt cx="0" cy="0"/>
+        </a:xfrm>
+      </p:grpSpPr>
       <p:sp>
         <p:nvSpPr>
           <p:cNvPr id="4" name="Oval 3">
             <a:extLst>
               <a:ext uri="{FF2B5EF4-FFF2-40B4-BE49-F238E27FC236}">
-                <a16:creationId xmlns:a16="http://schemas.microsoft.com/office/drawing/2014/main" id="{FE979C3B-88DA-0DB3-241C-764E6D0CF08F}"/>
+                <a16:creationId xmlns:a16="http://schemas.microsoft.com/office/drawing/2014/main" id="{2A11F371-68F6-F0CD-9AF0-F58411EE8637}"/>
               </a:ext>
             </a:extLst>
           </p:cNvPr>
@@ -4551,7 +4284,7 @@
           <p:cNvPr id="2" name="Rectangle 1">
             <a:extLst>
               <a:ext uri="{FF2B5EF4-FFF2-40B4-BE49-F238E27FC236}">
-                <a16:creationId xmlns:a16="http://schemas.microsoft.com/office/drawing/2014/main" id="{82E4D386-853B-5054-E536-190972D5033F}"/>
+                <a16:creationId xmlns:a16="http://schemas.microsoft.com/office/drawing/2014/main" id="{450F97D1-2DE9-B719-4158-04D2E1F03432}"/>
               </a:ext>
             </a:extLst>
           </p:cNvPr>
@@ -4595,6 +4328,259 @@
             <a:r>
               <a:rPr lang="en-US" sz="7200" dirty="0">
                 <a:solidFill>
+                  <a:schemeClr val="accent4"/>
+                </a:solidFill>
+                <a:latin typeface="Syne ExtraBold" pitchFamily="2" charset="0"/>
+              </a:rPr>
+              <a:t>Skedee</a:t>
+            </a:r>
+          </a:p>
+        </p:txBody>
+      </p:sp>
+    </p:spTree>
+    <p:extLst>
+      <p:ext uri="{BB962C8B-B14F-4D97-AF65-F5344CB8AC3E}">
+        <p14:creationId xmlns:p14="http://schemas.microsoft.com/office/powerpoint/2010/main" val="718771487"/>
+      </p:ext>
+    </p:extLst>
+  </p:cSld>
+  <p:clrMapOvr>
+    <a:masterClrMapping/>
+  </p:clrMapOvr>
+</p:sld>
+</file>
+
+<file path=ppt/slides/slide12.xml><?xml version="1.0" encoding="utf-8"?>
+<p:sld xmlns:a="http://schemas.openxmlformats.org/drawingml/2006/main" xmlns:r="http://schemas.openxmlformats.org/officeDocument/2006/relationships" xmlns:p="http://schemas.openxmlformats.org/presentationml/2006/main">
+  <p:cSld>
+    <p:spTree>
+      <p:nvGrpSpPr>
+        <p:cNvPr id="1" name="">
+          <a:extLst>
+            <a:ext uri="{FF2B5EF4-FFF2-40B4-BE49-F238E27FC236}">
+              <a16:creationId xmlns:a16="http://schemas.microsoft.com/office/drawing/2014/main" id="{06B4BCC2-8F45-409D-4CBC-A61A5BD7E503}"/>
+            </a:ext>
+          </a:extLst>
+        </p:cNvPr>
+        <p:cNvGrpSpPr/>
+        <p:nvPr/>
+      </p:nvGrpSpPr>
+      <p:grpSpPr>
+        <a:xfrm>
+          <a:off x="0" y="0"/>
+          <a:ext cx="0" cy="0"/>
+          <a:chOff x="0" y="0"/>
+          <a:chExt cx="0" cy="0"/>
+        </a:xfrm>
+      </p:grpSpPr>
+      <p:sp>
+        <p:nvSpPr>
+          <p:cNvPr id="4" name="Oval 3">
+            <a:extLst>
+              <a:ext uri="{FF2B5EF4-FFF2-40B4-BE49-F238E27FC236}">
+                <a16:creationId xmlns:a16="http://schemas.microsoft.com/office/drawing/2014/main" id="{FE979C3B-88DA-0DB3-241C-764E6D0CF08F}"/>
+              </a:ext>
+            </a:extLst>
+          </p:cNvPr>
+          <p:cNvSpPr/>
+          <p:nvPr/>
+        </p:nvSpPr>
+        <p:spPr>
+          <a:xfrm>
+            <a:off x="1502230" y="2324100"/>
+            <a:ext cx="2212848" cy="2209800"/>
+          </a:xfrm>
+          <a:custGeom>
+            <a:avLst/>
+            <a:gdLst>
+              <a:gd name="csX0" fmla="*/ 0 w 2212848"/>
+              <a:gd name="csY0" fmla="*/ 1104900 h 2209800"/>
+              <a:gd name="csX1" fmla="*/ 1106424 w 2212848"/>
+              <a:gd name="csY1" fmla="*/ 0 h 2209800"/>
+              <a:gd name="csX2" fmla="*/ 2212848 w 2212848"/>
+              <a:gd name="csY2" fmla="*/ 1104900 h 2209800"/>
+              <a:gd name="csX3" fmla="*/ 1106424 w 2212848"/>
+              <a:gd name="csY3" fmla="*/ 2209800 h 2209800"/>
+              <a:gd name="csX4" fmla="*/ 0 w 2212848"/>
+              <a:gd name="csY4" fmla="*/ 1104900 h 2209800"/>
+            </a:gdLst>
+            <a:ahLst/>
+            <a:cxnLst>
+              <a:cxn ang="0">
+                <a:pos x="csX0" y="csY0"/>
+              </a:cxn>
+              <a:cxn ang="0">
+                <a:pos x="csX1" y="csY1"/>
+              </a:cxn>
+              <a:cxn ang="0">
+                <a:pos x="csX2" y="csY2"/>
+              </a:cxn>
+              <a:cxn ang="0">
+                <a:pos x="csX3" y="csY3"/>
+              </a:cxn>
+              <a:cxn ang="0">
+                <a:pos x="csX4" y="csY4"/>
+              </a:cxn>
+            </a:cxnLst>
+            <a:rect l="l" t="t" r="r" b="b"/>
+            <a:pathLst>
+              <a:path w="2212848" h="2209800" fill="none" extrusionOk="0">
+                <a:moveTo>
+                  <a:pt x="0" y="1104900"/>
+                </a:moveTo>
+                <a:cubicBezTo>
+                  <a:pt x="99106" y="440367"/>
+                  <a:pt x="597664" y="-8622"/>
+                  <a:pt x="1106424" y="0"/>
+                </a:cubicBezTo>
+                <a:cubicBezTo>
+                  <a:pt x="1692334" y="15934"/>
+                  <a:pt x="2248644" y="500016"/>
+                  <a:pt x="2212848" y="1104900"/>
+                </a:cubicBezTo>
+                <a:cubicBezTo>
+                  <a:pt x="2246522" y="1678391"/>
+                  <a:pt x="1688700" y="2200425"/>
+                  <a:pt x="1106424" y="2209800"/>
+                </a:cubicBezTo>
+                <a:cubicBezTo>
+                  <a:pt x="397374" y="2272170"/>
+                  <a:pt x="21254" y="1756060"/>
+                  <a:pt x="0" y="1104900"/>
+                </a:cubicBezTo>
+                <a:close/>
+              </a:path>
+              <a:path w="2212848" h="2209800" stroke="0" extrusionOk="0">
+                <a:moveTo>
+                  <a:pt x="0" y="1104900"/>
+                </a:moveTo>
+                <a:cubicBezTo>
+                  <a:pt x="69302" y="431607"/>
+                  <a:pt x="521526" y="66383"/>
+                  <a:pt x="1106424" y="0"/>
+                </a:cubicBezTo>
+                <a:cubicBezTo>
+                  <a:pt x="1674758" y="-23631"/>
+                  <a:pt x="2114362" y="527648"/>
+                  <a:pt x="2212848" y="1104900"/>
+                </a:cubicBezTo>
+                <a:cubicBezTo>
+                  <a:pt x="2243622" y="1726495"/>
+                  <a:pt x="1663114" y="2278687"/>
+                  <a:pt x="1106424" y="2209800"/>
+                </a:cubicBezTo>
+                <a:cubicBezTo>
+                  <a:pt x="569345" y="2268057"/>
+                  <a:pt x="-19520" y="1726409"/>
+                  <a:pt x="0" y="1104900"/>
+                </a:cubicBezTo>
+                <a:close/>
+              </a:path>
+            </a:pathLst>
+          </a:custGeom>
+          <a:solidFill>
+            <a:schemeClr val="tx1"/>
+          </a:solidFill>
+          <a:ln>
+            <a:solidFill>
+              <a:schemeClr val="bg1"/>
+            </a:solidFill>
+            <a:extLst>
+              <a:ext uri="{C807C97D-BFC1-408E-A445-0C87EB9F89A2}">
+                <ask:lineSketchStyleProps xmlns:ask="http://schemas.microsoft.com/office/drawing/2018/sketchyshapes" sd="1808761005">
+                  <a:prstGeom prst="ellipse">
+                    <a:avLst/>
+                  </a:prstGeom>
+                  <ask:type>
+                    <ask:lineSketchCurved/>
+                  </ask:type>
+                </ask:lineSketchStyleProps>
+              </a:ext>
+            </a:extLst>
+          </a:ln>
+        </p:spPr>
+        <p:style>
+          <a:lnRef idx="2">
+            <a:schemeClr val="accent1">
+              <a:shade val="15000"/>
+            </a:schemeClr>
+          </a:lnRef>
+          <a:fillRef idx="1">
+            <a:schemeClr val="accent1"/>
+          </a:fillRef>
+          <a:effectRef idx="0">
+            <a:schemeClr val="accent1"/>
+          </a:effectRef>
+          <a:fontRef idx="minor">
+            <a:schemeClr val="lt1"/>
+          </a:fontRef>
+        </p:style>
+        <p:txBody>
+          <a:bodyPr rtlCol="0" anchor="ctr"/>
+          <a:lstStyle/>
+          <a:p>
+            <a:pPr algn="ctr"/>
+            <a:r>
+              <a:rPr lang="en-US" sz="15000" dirty="0">
+                <a:solidFill>
+                  <a:schemeClr val="accent4"/>
+                </a:solidFill>
+                <a:latin typeface="Syne ExtraBold" pitchFamily="2" charset="0"/>
+              </a:rPr>
+              <a:t>$</a:t>
+            </a:r>
+          </a:p>
+        </p:txBody>
+      </p:sp>
+      <p:sp>
+        <p:nvSpPr>
+          <p:cNvPr id="2" name="Rectangle 1">
+            <a:extLst>
+              <a:ext uri="{FF2B5EF4-FFF2-40B4-BE49-F238E27FC236}">
+                <a16:creationId xmlns:a16="http://schemas.microsoft.com/office/drawing/2014/main" id="{82E4D386-853B-5054-E536-190972D5033F}"/>
+              </a:ext>
+            </a:extLst>
+          </p:cNvPr>
+          <p:cNvSpPr/>
+          <p:nvPr/>
+        </p:nvSpPr>
+        <p:spPr>
+          <a:xfrm>
+            <a:off x="3788230" y="2324100"/>
+            <a:ext cx="6651171" cy="2209800"/>
+          </a:xfrm>
+          <a:prstGeom prst="rect">
+            <a:avLst/>
+          </a:prstGeom>
+          <a:noFill/>
+          <a:ln>
+            <a:noFill/>
+          </a:ln>
+        </p:spPr>
+        <p:style>
+          <a:lnRef idx="2">
+            <a:schemeClr val="accent1">
+              <a:shade val="15000"/>
+            </a:schemeClr>
+          </a:lnRef>
+          <a:fillRef idx="1">
+            <a:schemeClr val="accent1"/>
+          </a:fillRef>
+          <a:effectRef idx="0">
+            <a:schemeClr val="accent1"/>
+          </a:effectRef>
+          <a:fontRef idx="minor">
+            <a:schemeClr val="lt1"/>
+          </a:fontRef>
+        </p:style>
+        <p:txBody>
+          <a:bodyPr rtlCol="0" anchor="ctr"/>
+          <a:lstStyle/>
+          <a:p>
+            <a:pPr algn="ctr"/>
+            <a:r>
+              <a:rPr lang="en-US" sz="7200" dirty="0">
+                <a:solidFill>
                   <a:schemeClr val="tx1"/>
                 </a:solidFill>
                 <a:latin typeface="Syne ExtraBold" pitchFamily="2" charset="0"/>
@@ -4617,7 +4603,7 @@
 </p:sld>
 </file>
 
-<file path=ppt/slides/slide11.xml><?xml version="1.0" encoding="utf-8"?>
+<file path=ppt/slides/slide13.xml><?xml version="1.0" encoding="utf-8"?>
 <p:sld xmlns:a="http://schemas.openxmlformats.org/drawingml/2006/main" xmlns:r="http://schemas.openxmlformats.org/officeDocument/2006/relationships" xmlns:p="http://schemas.openxmlformats.org/presentationml/2006/main">
   <p:cSld>
     <p:spTree>
@@ -5214,7 +5200,87 @@
 </p:sld>
 </file>
 
-<file path=ppt/slides/slide12.xml><?xml version="1.0" encoding="utf-8"?>
+<file path=ppt/slides/slide14.xml><?xml version="1.0" encoding="utf-8"?>
+<p:sld xmlns:a="http://schemas.openxmlformats.org/drawingml/2006/main" xmlns:r="http://schemas.openxmlformats.org/officeDocument/2006/relationships" xmlns:p="http://schemas.openxmlformats.org/presentationml/2006/main">
+  <p:cSld>
+    <p:spTree>
+      <p:nvGrpSpPr>
+        <p:cNvPr id="1" name=""/>
+        <p:cNvGrpSpPr/>
+        <p:nvPr/>
+      </p:nvGrpSpPr>
+      <p:grpSpPr>
+        <a:xfrm>
+          <a:off x="0" y="0"/>
+          <a:ext cx="0" cy="0"/>
+          <a:chOff x="0" y="0"/>
+          <a:chExt cx="0" cy="0"/>
+        </a:xfrm>
+      </p:grpSpPr>
+      <p:sp>
+        <p:nvSpPr>
+          <p:cNvPr id="2" name="Title 1">
+            <a:extLst>
+              <a:ext uri="{FF2B5EF4-FFF2-40B4-BE49-F238E27FC236}">
+                <a16:creationId xmlns:a16="http://schemas.microsoft.com/office/drawing/2014/main" id="{BB47E1BD-AD2F-CA61-18BF-4720E24388CD}"/>
+              </a:ext>
+            </a:extLst>
+          </p:cNvPr>
+          <p:cNvSpPr>
+            <a:spLocks noGrp="1"/>
+          </p:cNvSpPr>
+          <p:nvPr>
+            <p:ph type="title"/>
+          </p:nvPr>
+        </p:nvSpPr>
+        <p:spPr/>
+        <p:txBody>
+          <a:bodyPr/>
+          <a:lstStyle/>
+          <a:p>
+            <a:endParaRPr lang="en-US"/>
+          </a:p>
+        </p:txBody>
+      </p:sp>
+      <p:sp>
+        <p:nvSpPr>
+          <p:cNvPr id="3" name="Content Placeholder 2">
+            <a:extLst>
+              <a:ext uri="{FF2B5EF4-FFF2-40B4-BE49-F238E27FC236}">
+                <a16:creationId xmlns:a16="http://schemas.microsoft.com/office/drawing/2014/main" id="{0EB85410-87F8-C157-4E9C-4322B5C5F4AF}"/>
+              </a:ext>
+            </a:extLst>
+          </p:cNvPr>
+          <p:cNvSpPr>
+            <a:spLocks noGrp="1"/>
+          </p:cNvSpPr>
+          <p:nvPr>
+            <p:ph idx="1"/>
+          </p:nvPr>
+        </p:nvSpPr>
+        <p:spPr/>
+        <p:txBody>
+          <a:bodyPr/>
+          <a:lstStyle/>
+          <a:p>
+            <a:endParaRPr lang="en-US"/>
+          </a:p>
+        </p:txBody>
+      </p:sp>
+    </p:spTree>
+    <p:extLst>
+      <p:ext uri="{BB962C8B-B14F-4D97-AF65-F5344CB8AC3E}">
+        <p14:creationId xmlns:p14="http://schemas.microsoft.com/office/powerpoint/2010/main" val="3009126990"/>
+      </p:ext>
+    </p:extLst>
+  </p:cSld>
+  <p:clrMapOvr>
+    <a:masterClrMapping/>
+  </p:clrMapOvr>
+</p:sld>
+</file>
+
+<file path=ppt/slides/slide15.xml><?xml version="1.0" encoding="utf-8"?>
 <p:sld xmlns:a="http://schemas.openxmlformats.org/drawingml/2006/main" xmlns:r="http://schemas.openxmlformats.org/officeDocument/2006/relationships" xmlns:p="http://schemas.openxmlformats.org/presentationml/2006/main">
   <p:cSld>
     <p:spTree>
@@ -6029,7 +6095,7 @@
 </p:sld>
 </file>
 
-<file path=ppt/slides/slide13.xml><?xml version="1.0" encoding="utf-8"?>
+<file path=ppt/slides/slide16.xml><?xml version="1.0" encoding="utf-8"?>
 <p:sld xmlns:a="http://schemas.openxmlformats.org/drawingml/2006/main" xmlns:r="http://schemas.openxmlformats.org/officeDocument/2006/relationships" xmlns:p="http://schemas.openxmlformats.org/presentationml/2006/main">
   <p:cSld>
     <p:spTree>
@@ -6598,7 +6664,7 @@
 </p:sld>
 </file>
 
-<file path=ppt/slides/slide14.xml><?xml version="1.0" encoding="utf-8"?>
+<file path=ppt/slides/slide17.xml><?xml version="1.0" encoding="utf-8"?>
 <p:sld xmlns:a="http://schemas.openxmlformats.org/drawingml/2006/main" xmlns:r="http://schemas.openxmlformats.org/officeDocument/2006/relationships" xmlns:p="http://schemas.openxmlformats.org/presentationml/2006/main">
   <p:cSld>
     <p:spTree>
@@ -8338,13 +8404,7 @@
   <p:cSld>
     <p:spTree>
       <p:nvGrpSpPr>
-        <p:cNvPr id="1" name="">
-          <a:extLst>
-            <a:ext uri="{FF2B5EF4-FFF2-40B4-BE49-F238E27FC236}">
-              <a16:creationId xmlns:a16="http://schemas.microsoft.com/office/drawing/2014/main" id="{A2A8C12B-02B4-6379-FBBE-525E70A497C7}"/>
-            </a:ext>
-          </a:extLst>
-        </p:cNvPr>
+        <p:cNvPr id="1" name=""/>
         <p:cNvGrpSpPr/>
         <p:nvPr/>
       </p:nvGrpSpPr>
@@ -8356,227 +8416,40 @@
           <a:chExt cx="0" cy="0"/>
         </a:xfrm>
       </p:grpSpPr>
-      <p:sp>
-        <p:nvSpPr>
-          <p:cNvPr id="4" name="Oval 3">
-            <a:extLst>
-              <a:ext uri="{FF2B5EF4-FFF2-40B4-BE49-F238E27FC236}">
-                <a16:creationId xmlns:a16="http://schemas.microsoft.com/office/drawing/2014/main" id="{2A11F371-68F6-F0CD-9AF0-F58411EE8637}"/>
-              </a:ext>
-            </a:extLst>
-          </p:cNvPr>
-          <p:cNvSpPr/>
+      <p:pic>
+        <p:nvPicPr>
+          <p:cNvPr id="8" name="Picture 7">
+            <a:extLst>
+              <a:ext uri="{FF2B5EF4-FFF2-40B4-BE49-F238E27FC236}">
+                <a16:creationId xmlns:a16="http://schemas.microsoft.com/office/drawing/2014/main" id="{8776C58A-8913-808C-7243-1F2D71A97FE5}"/>
+              </a:ext>
+            </a:extLst>
+          </p:cNvPr>
+          <p:cNvPicPr>
+            <a:picLocks noChangeAspect="1"/>
+          </p:cNvPicPr>
           <p:nvPr/>
-        </p:nvSpPr>
+        </p:nvPicPr>
+        <p:blipFill>
+          <a:blip r:embed="rId2"/>
+          <a:stretch>
+            <a:fillRect/>
+          </a:stretch>
+        </p:blipFill>
         <p:spPr>
           <a:xfrm>
-            <a:off x="1502230" y="2324100"/>
-            <a:ext cx="2212848" cy="2209800"/>
-          </a:xfrm>
-          <a:custGeom>
-            <a:avLst/>
-            <a:gdLst>
-              <a:gd name="csX0" fmla="*/ 0 w 2212848"/>
-              <a:gd name="csY0" fmla="*/ 1104900 h 2209800"/>
-              <a:gd name="csX1" fmla="*/ 1106424 w 2212848"/>
-              <a:gd name="csY1" fmla="*/ 0 h 2209800"/>
-              <a:gd name="csX2" fmla="*/ 2212848 w 2212848"/>
-              <a:gd name="csY2" fmla="*/ 1104900 h 2209800"/>
-              <a:gd name="csX3" fmla="*/ 1106424 w 2212848"/>
-              <a:gd name="csY3" fmla="*/ 2209800 h 2209800"/>
-              <a:gd name="csX4" fmla="*/ 0 w 2212848"/>
-              <a:gd name="csY4" fmla="*/ 1104900 h 2209800"/>
-            </a:gdLst>
-            <a:ahLst/>
-            <a:cxnLst>
-              <a:cxn ang="0">
-                <a:pos x="csX0" y="csY0"/>
-              </a:cxn>
-              <a:cxn ang="0">
-                <a:pos x="csX1" y="csY1"/>
-              </a:cxn>
-              <a:cxn ang="0">
-                <a:pos x="csX2" y="csY2"/>
-              </a:cxn>
-              <a:cxn ang="0">
-                <a:pos x="csX3" y="csY3"/>
-              </a:cxn>
-              <a:cxn ang="0">
-                <a:pos x="csX4" y="csY4"/>
-              </a:cxn>
-            </a:cxnLst>
-            <a:rect l="l" t="t" r="r" b="b"/>
-            <a:pathLst>
-              <a:path w="2212848" h="2209800" fill="none" extrusionOk="0">
-                <a:moveTo>
-                  <a:pt x="0" y="1104900"/>
-                </a:moveTo>
-                <a:cubicBezTo>
-                  <a:pt x="99106" y="440367"/>
-                  <a:pt x="597664" y="-8622"/>
-                  <a:pt x="1106424" y="0"/>
-                </a:cubicBezTo>
-                <a:cubicBezTo>
-                  <a:pt x="1692334" y="15934"/>
-                  <a:pt x="2248644" y="500016"/>
-                  <a:pt x="2212848" y="1104900"/>
-                </a:cubicBezTo>
-                <a:cubicBezTo>
-                  <a:pt x="2246522" y="1678391"/>
-                  <a:pt x="1688700" y="2200425"/>
-                  <a:pt x="1106424" y="2209800"/>
-                </a:cubicBezTo>
-                <a:cubicBezTo>
-                  <a:pt x="397374" y="2272170"/>
-                  <a:pt x="21254" y="1756060"/>
-                  <a:pt x="0" y="1104900"/>
-                </a:cubicBezTo>
-                <a:close/>
-              </a:path>
-              <a:path w="2212848" h="2209800" stroke="0" extrusionOk="0">
-                <a:moveTo>
-                  <a:pt x="0" y="1104900"/>
-                </a:moveTo>
-                <a:cubicBezTo>
-                  <a:pt x="69302" y="431607"/>
-                  <a:pt x="521526" y="66383"/>
-                  <a:pt x="1106424" y="0"/>
-                </a:cubicBezTo>
-                <a:cubicBezTo>
-                  <a:pt x="1674758" y="-23631"/>
-                  <a:pt x="2114362" y="527648"/>
-                  <a:pt x="2212848" y="1104900"/>
-                </a:cubicBezTo>
-                <a:cubicBezTo>
-                  <a:pt x="2243622" y="1726495"/>
-                  <a:pt x="1663114" y="2278687"/>
-                  <a:pt x="1106424" y="2209800"/>
-                </a:cubicBezTo>
-                <a:cubicBezTo>
-                  <a:pt x="569345" y="2268057"/>
-                  <a:pt x="-19520" y="1726409"/>
-                  <a:pt x="0" y="1104900"/>
-                </a:cubicBezTo>
-                <a:close/>
-              </a:path>
-            </a:pathLst>
-          </a:custGeom>
-          <a:solidFill>
-            <a:schemeClr val="tx1"/>
-          </a:solidFill>
-          <a:ln>
-            <a:solidFill>
-              <a:schemeClr val="bg1"/>
-            </a:solidFill>
-            <a:extLst>
-              <a:ext uri="{C807C97D-BFC1-408E-A445-0C87EB9F89A2}">
-                <ask:lineSketchStyleProps xmlns:ask="http://schemas.microsoft.com/office/drawing/2018/sketchyshapes" sd="1808761005">
-                  <a:prstGeom prst="ellipse">
-                    <a:avLst/>
-                  </a:prstGeom>
-                  <ask:type>
-                    <ask:lineSketchCurved/>
-                  </ask:type>
-                </ask:lineSketchStyleProps>
-              </a:ext>
-            </a:extLst>
-          </a:ln>
-        </p:spPr>
-        <p:style>
-          <a:lnRef idx="2">
-            <a:schemeClr val="accent1">
-              <a:shade val="15000"/>
-            </a:schemeClr>
-          </a:lnRef>
-          <a:fillRef idx="1">
-            <a:schemeClr val="accent1"/>
-          </a:fillRef>
-          <a:effectRef idx="0">
-            <a:schemeClr val="accent1"/>
-          </a:effectRef>
-          <a:fontRef idx="minor">
-            <a:schemeClr val="lt1"/>
-          </a:fontRef>
-        </p:style>
-        <p:txBody>
-          <a:bodyPr rtlCol="0" anchor="ctr"/>
-          <a:lstStyle/>
-          <a:p>
-            <a:pPr algn="ctr"/>
-            <a:r>
-              <a:rPr lang="en-US" sz="15000" dirty="0">
-                <a:solidFill>
-                  <a:schemeClr val="accent4"/>
-                </a:solidFill>
-                <a:latin typeface="Syne ExtraBold" pitchFamily="2" charset="0"/>
-              </a:rPr>
-              <a:t>$</a:t>
-            </a:r>
-          </a:p>
-        </p:txBody>
-      </p:sp>
-      <p:sp>
-        <p:nvSpPr>
-          <p:cNvPr id="2" name="Rectangle 1">
-            <a:extLst>
-              <a:ext uri="{FF2B5EF4-FFF2-40B4-BE49-F238E27FC236}">
-                <a16:creationId xmlns:a16="http://schemas.microsoft.com/office/drawing/2014/main" id="{450F97D1-2DE9-B719-4158-04D2E1F03432}"/>
-              </a:ext>
-            </a:extLst>
-          </p:cNvPr>
-          <p:cNvSpPr/>
-          <p:nvPr/>
-        </p:nvSpPr>
-        <p:spPr>
-          <a:xfrm>
-            <a:off x="3788230" y="2324100"/>
-            <a:ext cx="6651171" cy="2209800"/>
+            <a:off x="2636220" y="2415077"/>
+            <a:ext cx="6919560" cy="2213040"/>
           </a:xfrm>
           <a:prstGeom prst="rect">
             <a:avLst/>
           </a:prstGeom>
-          <a:noFill/>
-          <a:ln>
-            <a:noFill/>
-          </a:ln>
         </p:spPr>
-        <p:style>
-          <a:lnRef idx="2">
-            <a:schemeClr val="accent1">
-              <a:shade val="15000"/>
-            </a:schemeClr>
-          </a:lnRef>
-          <a:fillRef idx="1">
-            <a:schemeClr val="accent1"/>
-          </a:fillRef>
-          <a:effectRef idx="0">
-            <a:schemeClr val="accent1"/>
-          </a:effectRef>
-          <a:fontRef idx="minor">
-            <a:schemeClr val="lt1"/>
-          </a:fontRef>
-        </p:style>
-        <p:txBody>
-          <a:bodyPr rtlCol="0" anchor="ctr"/>
-          <a:lstStyle/>
-          <a:p>
-            <a:pPr algn="ctr"/>
-            <a:r>
-              <a:rPr lang="en-US" sz="7200" dirty="0">
-                <a:solidFill>
-                  <a:schemeClr val="accent4"/>
-                </a:solidFill>
-                <a:latin typeface="Syne ExtraBold" pitchFamily="2" charset="0"/>
-              </a:rPr>
-              <a:t>Skedee</a:t>
-            </a:r>
-          </a:p>
-        </p:txBody>
-      </p:sp>
+      </p:pic>
     </p:spTree>
     <p:extLst>
       <p:ext uri="{BB962C8B-B14F-4D97-AF65-F5344CB8AC3E}">
-        <p14:creationId xmlns:p14="http://schemas.microsoft.com/office/powerpoint/2010/main" val="718771487"/>
+        <p14:creationId xmlns:p14="http://schemas.microsoft.com/office/powerpoint/2010/main" val="492773096"/>
       </p:ext>
     </p:extLst>
   </p:cSld>
